--- a/out/kit-teal.pptx
+++ b/out/kit-teal.pptx
@@ -4,6 +4,9 @@
   <p:sldMasterIdLst>
     <p:sldMasterId id="2147483648" r:id="rId1"/>
   </p:sldMasterIdLst>
+  <p:notesMasterIdLst>
+    <p:notesMasterId r:id="rId14"/>
+  </p:notesMasterIdLst>
   <p:sldIdLst>
     <p:sldId id="256" r:id="rId2"/>
     <p:sldId id="257" r:id="rId3"/>
@@ -18,9 +21,6 @@
     <p:sldId id="266" r:id="rId12"/>
     <p:sldId id="267" r:id="rId13"/>
   </p:sldIdLst>
-  <p:notesMasterIdLst>
-    <p:notesMasterId r:id="rId14"/>
-  </p:notesMasterIdLst>
   <p:sldSz cx="12192000" cy="6858000"/>
   <p:notesSz cx="6858000" cy="12192000"/>
   <p:defaultTextStyle>
@@ -2139,7 +2139,7 @@
             <a:prstDash val="solid"/>
           </a:ln>
           <a:effectLst>
-            <a:outerShdw blurRad="127000" dist="38100" dir="5400000" sx="100000" sy="100000" algn="ctr" rotWithShape="0">
+            <a:outerShdw blurRad="121285" dist="36322" dir="5400000" sx="100000" sy="100000" algn="ctr" rotWithShape="0">
               <a:srgbClr val="000000">
                 <a:alpha val="20000"/>
               </a:srgbClr>
@@ -3747,7 +3747,7 @@
             <a:prstDash val="solid"/>
           </a:ln>
           <a:effectLst>
-            <a:outerShdw blurRad="127000" dist="38100" dir="5400000" sx="100000" sy="100000" algn="ctr" rotWithShape="0">
+            <a:outerShdw blurRad="109728" dist="32893" dir="5400000" sx="100000" sy="100000" algn="ctr" rotWithShape="0">
               <a:srgbClr val="000000">
                 <a:alpha val="20000"/>
               </a:srgbClr>
@@ -5546,9 +5546,9 @@
           </a:solidFill>
           <a:ln/>
           <a:effectLst>
-            <a:outerShdw blurRad="228600" dist="25400" dir="5400000" sx="102000" sy="102000" algn="ctr" rotWithShape="0">
+            <a:outerShdw blurRad="96012" dist="15240" dir="5400000" sx="100840" sy="100840" algn="ctr" rotWithShape="0">
               <a:srgbClr val="000000">
-                <a:alpha val="28000"/>
+                <a:alpha val="25000"/>
               </a:srgbClr>
             </a:outerShdw>
           </a:effectLst>
@@ -5668,9 +5668,9 @@
             </a:solidFill>
             <a:ln/>
             <a:effectLst>
-              <a:outerShdw blurRad="228600" dist="25400" dir="5400000" sx="102000" sy="102000" algn="ctr" rotWithShape="0">
+              <a:outerShdw blurRad="96012" dist="15240" dir="5400000" sx="100840" sy="100840" algn="ctr" rotWithShape="0">
                 <a:srgbClr val="000000">
-                  <a:alpha val="28000"/>
+                  <a:alpha val="25000"/>
                 </a:srgbClr>
               </a:outerShdw>
             </a:effectLst>
@@ -7324,9 +7324,6 @@
               </a:rPr>
               <a:t>青綠科技</a:t>
             </a:r>
-            <a:pPr algn="l" indent="0" marL="0">
-              <a:buNone/>
-            </a:pPr>
             <a:r>
               <a:rPr lang="en-US" sz="900" dirty="0">
                 <a:solidFill>
@@ -8855,9 +8852,6 @@
               </a:rPr>
               <a:t>青綠科技</a:t>
             </a:r>
-            <a:pPr algn="l" indent="0" marL="0">
-              <a:buNone/>
-            </a:pPr>
             <a:r>
               <a:rPr lang="en-US" sz="900" dirty="0">
                 <a:solidFill>
@@ -10899,9 +10893,6 @@
               </a:rPr>
               <a:t>組織</a:t>
             </a:r>
-            <a:pPr algn="ctr" indent="0" marL="0">
-              <a:buNone/>
-            </a:pPr>
             <a:r>
               <a:rPr lang="en-US" sz="1100" dirty="0">
                 <a:solidFill>
@@ -11621,9 +11612,6 @@
               </a:rPr>
               <a:t>青綠科技</a:t>
             </a:r>
-            <a:pPr algn="l" indent="0" marL="0">
-              <a:buNone/>
-            </a:pPr>
             <a:r>
               <a:rPr lang="en-US" sz="900" dirty="0">
                 <a:solidFill>
@@ -14939,9 +14927,6 @@
               </a:rPr>
               <a:t>青綠科技</a:t>
             </a:r>
-            <a:pPr algn="l" indent="0" marL="0">
-              <a:buNone/>
-            </a:pPr>
             <a:r>
               <a:rPr lang="en-US" sz="900" dirty="0">
                 <a:solidFill>
@@ -15203,9 +15188,6 @@
               </a:rPr>
               <a:t>三步驟流程</a:t>
             </a:r>
-            <a:pPr algn="l" indent="0" marL="0">
-              <a:buNone/>
-            </a:pPr>
             <a:r>
               <a:rPr lang="en-US" sz="800" dirty="0">
                 <a:solidFill>
@@ -15721,9 +15703,6 @@
               </a:rPr>
               <a:t>判斷分岔（是／否）</a:t>
             </a:r>
-            <a:pPr algn="l" indent="0" marL="0">
-              <a:buNone/>
-            </a:pPr>
             <a:r>
               <a:rPr lang="en-US" sz="800" dirty="0">
                 <a:solidFill>
@@ -16169,9 +16148,6 @@
               </a:rPr>
               <a:t>例外退回路徑</a:t>
             </a:r>
-            <a:pPr algn="l" indent="0" marL="0">
-              <a:buNone/>
-            </a:pPr>
             <a:r>
               <a:rPr lang="en-US" sz="800" dirty="0">
                 <a:solidFill>
@@ -16566,9 +16542,6 @@
               </a:rPr>
               <a:t>審核迴圈</a:t>
             </a:r>
-            <a:pPr algn="l" indent="0" marL="0">
-              <a:buNone/>
-            </a:pPr>
             <a:r>
               <a:rPr lang="en-US" sz="800" dirty="0">
                 <a:solidFill>
@@ -17000,9 +16973,6 @@
               </a:rPr>
               <a:t>泳道（雙道）</a:t>
             </a:r>
-            <a:pPr algn="l" indent="0" marL="0">
-              <a:buNone/>
-            </a:pPr>
             <a:r>
               <a:rPr lang="en-US" sz="800" dirty="0">
                 <a:solidFill>
@@ -17575,9 +17545,6 @@
               </a:rPr>
               <a:t>平行分流／合流</a:t>
             </a:r>
-            <a:pPr algn="l" indent="0" marL="0">
-              <a:buNone/>
-            </a:pPr>
             <a:r>
               <a:rPr lang="en-US" sz="800" dirty="0">
                 <a:solidFill>
@@ -18079,9 +18046,6 @@
               </a:rPr>
               <a:t>輸入→處理→輸出</a:t>
             </a:r>
-            <a:pPr algn="l" indent="0" marL="0">
-              <a:buNone/>
-            </a:pPr>
             <a:r>
               <a:rPr lang="en-US" sz="800" dirty="0">
                 <a:solidFill>
@@ -18522,9 +18486,6 @@
               </a:rPr>
               <a:t>前後對照</a:t>
             </a:r>
-            <a:pPr algn="l" indent="0" marL="0">
-              <a:buNone/>
-            </a:pPr>
             <a:r>
               <a:rPr lang="en-US" sz="800" dirty="0">
                 <a:solidFill>
@@ -18651,9 +18612,6 @@
                 </a:rPr>
                 <a:t>現況 </a:t>
               </a:r>
-              <a:pPr algn="l" indent="0" marL="0">
-                <a:buNone/>
-              </a:pPr>
               <a:r>
                 <a:rPr lang="en-US" sz="800" dirty="0">
                   <a:solidFill>
@@ -18842,9 +18800,6 @@
                 </a:rPr>
                 <a:t>改善後 </a:t>
               </a:r>
-              <a:pPr algn="l" indent="0" marL="0">
-                <a:buNone/>
-              </a:pPr>
               <a:r>
                 <a:rPr lang="en-US" sz="800" dirty="0">
                   <a:solidFill>
@@ -18958,9 +18913,6 @@
               </a:rPr>
               <a:t>青綠科技</a:t>
             </a:r>
-            <a:pPr algn="l" indent="0" marL="0">
-              <a:buNone/>
-            </a:pPr>
             <a:r>
               <a:rPr lang="en-US" sz="900" dirty="0">
                 <a:solidFill>
@@ -20271,9 +20223,6 @@
               </a:rPr>
               <a:t>大標題文字</a:t>
             </a:r>
-            <a:pPr algn="l" indent="0" marL="0">
-              <a:buNone/>
-            </a:pPr>
             <a:r>
               <a:rPr lang="en-US" sz="1000" dirty="0">
                 <a:solidFill>
@@ -20324,9 +20273,6 @@
               </a:rPr>
               <a:t>副標題・細字主色</a:t>
             </a:r>
-            <a:pPr algn="l" indent="0" marL="0">
-              <a:buNone/>
-            </a:pPr>
             <a:r>
               <a:rPr lang="en-US" sz="1000" dirty="0">
                 <a:solidFill>
@@ -20377,9 +20323,6 @@
               </a:rPr>
               <a:t>標籤與卡片標題</a:t>
             </a:r>
-            <a:pPr algn="l" indent="0" marL="0">
-              <a:buNone/>
-            </a:pPr>
             <a:r>
               <a:rPr lang="en-US" sz="1000" dirty="0">
                 <a:solidFill>
@@ -20430,9 +20373,6 @@
               </a:rPr>
               <a:t>內文說明文字，灰色、行距寬鬆</a:t>
             </a:r>
-            <a:pPr algn="l" indent="0" marL="0">
-              <a:buNone/>
-            </a:pPr>
             <a:r>
               <a:rPr lang="en-US" sz="1000" dirty="0">
                 <a:solidFill>
@@ -22169,9 +22109,6 @@
               </a:rPr>
               <a:t>青綠科技</a:t>
             </a:r>
-            <a:pPr algn="l" indent="0" marL="0">
-              <a:buNone/>
-            </a:pPr>
             <a:r>
               <a:rPr lang="en-US" sz="900" dirty="0">
                 <a:solidFill>
@@ -22442,9 +22379,6 @@
               </a:rPr>
               <a:t>標題＋內文</a:t>
             </a:r>
-            <a:pPr algn="l" indent="0" marL="0">
-              <a:buNone/>
-            </a:pPr>
             <a:r>
               <a:rPr lang="en-US" sz="1000" b="1" dirty="0">
                 <a:solidFill>
@@ -23645,9 +23579,6 @@
               </a:rPr>
               <a:t>青綠科技</a:t>
             </a:r>
-            <a:pPr algn="l" indent="0" marL="0">
-              <a:buNone/>
-            </a:pPr>
             <a:r>
               <a:rPr lang="en-US" sz="900" dirty="0">
                 <a:solidFill>
@@ -25830,9 +25761,6 @@
               </a:rPr>
               <a:t>青綠科技</a:t>
             </a:r>
-            <a:pPr algn="l" indent="0" marL="0">
-              <a:buNone/>
-            </a:pPr>
             <a:r>
               <a:rPr lang="en-US" sz="900" dirty="0">
                 <a:solidFill>
@@ -27640,9 +27568,6 @@
               </a:rPr>
               <a:t>青綠科技</a:t>
             </a:r>
-            <a:pPr algn="l" indent="0" marL="0">
-              <a:buNone/>
-            </a:pPr>
             <a:r>
               <a:rPr lang="en-US" sz="900" dirty="0">
                 <a:solidFill>
@@ -29939,9 +29864,6 @@
               </a:rPr>
               <a:t>青綠科技</a:t>
             </a:r>
-            <a:pPr algn="l" indent="0" marL="0">
-              <a:buNone/>
-            </a:pPr>
             <a:r>
               <a:rPr lang="en-US" sz="900" dirty="0">
                 <a:solidFill>
@@ -31509,9 +31431,6 @@
               </a:rPr>
               <a:t>青綠科技</a:t>
             </a:r>
-            <a:pPr algn="l" indent="0" marL="0">
-              <a:buNone/>
-            </a:pPr>
             <a:r>
               <a:rPr lang="en-US" sz="900" dirty="0">
                 <a:solidFill>
@@ -33808,9 +33727,6 @@
               </a:rPr>
               <a:t>青綠科技</a:t>
             </a:r>
-            <a:pPr algn="l" indent="0" marL="0">
-              <a:buNone/>
-            </a:pPr>
             <a:r>
               <a:rPr lang="en-US" sz="900" dirty="0">
                 <a:solidFill>
